--- a/dist/초2/사회·역사/마을과공동체/초2_사회·역사_마을과공동체_01_마을의시설_학생용.pptx
+++ b/dist/초2/사회·역사/마을과공동체/초2_사회·역사_마을과공동체_01_마을의시설_학생용.pptx
@@ -121,13 +121,13 @@
   <p:extLst>
     <p:ext uri="{521415D9-36F7-43E2-AB2F-B90AF26B5E84}">
       <p14:sectionLst xmlns:p14="http://schemas.microsoft.com/office/powerpoint/2010/main">
-        <p14:section name="도입" id="{87aceb53-a57c-58f9-ff73-eb3bd699db62}">
+        <p14:section name="도입" id="{81aa5d49-187b-d00e-6eb2-f62c957a7756}">
           <p14:sldIdLst>
             <p14:sldId id="256"/>
             <p14:sldId id="257"/>
           </p14:sldIdLst>
         </p14:section>
-        <p14:section name="개념" id="{72cf0e5f-b1aa-cb56-1de5-637f79b76354}">
+        <p14:section name="개념" id="{7d48f9e0-1e79-38f5-0c27-f63157dc8dba}">
           <p14:sldIdLst>
             <p14:sldId id="258"/>
             <p14:sldId id="259"/>
@@ -136,7 +136,7 @@
             <p14:sldId id="266"/>
           </p14:sldIdLst>
         </p14:section>
-        <p14:section name="연습" id="{50ca8512-1793-1515-fa09-1ac49b711061}">
+        <p14:section name="연습" id="{c0c5261a-5d12-6896-ae49-7c837f88980c}">
           <p14:sldIdLst>
             <p14:sldId id="262"/>
             <p14:sldId id="263"/>
@@ -144,27 +144,27 @@
             <p14:sldId id="267"/>
           </p14:sldIdLst>
         </p14:section>
-        <p14:section name="확인" id="{f6b23260-5a42-fb9f-b4d1-8540ea5ce93c}">
+        <p14:section name="확인" id="{13d57012-9008-4513-7452-c7fcd9d8e542}">
           <p14:sldIdLst>
             <p14:sldId id="265"/>
             <p14:sldId id="268"/>
           </p14:sldIdLst>
         </p14:section>
-        <p14:section name="개념" id="{b85d26b0-1a7c-9168-1f57-dcb8a9e38d22}">
+        <p14:section name="개념" id="{816c7935-6ad8-e4ce-48ec-26564650285e}">
           <p14:sldIdLst/>
         </p14:section>
-        <p14:section name="연습" id="{06e95b24-d092-9836-3968-e72d704cfdd4}">
+        <p14:section name="연습" id="{8a493c6d-a543-5abf-d8ea-18455fef845f}">
           <p14:sldIdLst/>
         </p14:section>
-        <p14:section name="확인" id="{a49c7cef-190e-ac4e-448c-b4d87dd33b90}">
+        <p14:section name="확인" id="{1ea13941-033c-73ca-03ef-a59ec76f7fcc}">
           <p14:sldIdLst/>
         </p14:section>
-        <p14:section name="정리" id="{0507ae62-3969-abc1-b510-47bd2d74c24f}">
+        <p14:section name="정리" id="{1c807275-8ab7-af22-b369-c2540d1d84b6}">
           <p14:sldIdLst>
             <p14:sldId id="269"/>
           </p14:sldIdLst>
         </p14:section>
-        <p14:section name="보충" id="{e3a3e30e-2bca-0fd8-6773-f6536144fa2f}">
+        <p14:section name="보충" id="{d25d39c5-c3d5-350e-834a-923381c1c0f9}">
           <p14:sldIdLst>
             <p14:sldId id="270"/>
           </p14:sldIdLst>
